--- a/dist/weeks-포트폴리오제작/포트폴리오제작_03주차_벤치마킹.pptx
+++ b/dist/weeks-포트폴리오제작/포트폴리오제작_03주차_벤치마킹.pptx
@@ -6620,7 +6620,7 @@
         <p:spPr>
           <a:xfrm>
             <a:off x="1353312" y="1755648"/>
-            <a:ext cx="4248760" cy="585216"/>
+            <a:ext cx="4267048" cy="585216"/>
           </a:xfrm>
           <a:prstGeom prst="rect">
             <a:avLst/>
@@ -6748,7 +6748,7 @@
         <p:spPr>
           <a:xfrm>
             <a:off x="1353312" y="2487168"/>
-            <a:ext cx="4248760" cy="585216"/>
+            <a:ext cx="4267048" cy="585216"/>
           </a:xfrm>
           <a:prstGeom prst="rect">
             <a:avLst/>
@@ -6876,7 +6876,7 @@
         <p:spPr>
           <a:xfrm>
             <a:off x="1353312" y="3218688"/>
-            <a:ext cx="4248760" cy="585216"/>
+            <a:ext cx="4267048" cy="585216"/>
           </a:xfrm>
           <a:prstGeom prst="rect">
             <a:avLst/>
@@ -7004,7 +7004,7 @@
         <p:spPr>
           <a:xfrm>
             <a:off x="1353312" y="3950208"/>
-            <a:ext cx="4248760" cy="585216"/>
+            <a:ext cx="4267048" cy="585216"/>
           </a:xfrm>
           <a:prstGeom prst="rect">
             <a:avLst/>
@@ -7132,7 +7132,7 @@
         <p:spPr>
           <a:xfrm>
             <a:off x="7010248" y="1755648"/>
-            <a:ext cx="4248760" cy="585216"/>
+            <a:ext cx="4267048" cy="585216"/>
           </a:xfrm>
           <a:prstGeom prst="rect">
             <a:avLst/>
@@ -7260,7 +7260,7 @@
         <p:spPr>
           <a:xfrm>
             <a:off x="7010248" y="2487168"/>
-            <a:ext cx="4248760" cy="585216"/>
+            <a:ext cx="4267048" cy="585216"/>
           </a:xfrm>
           <a:prstGeom prst="rect">
             <a:avLst/>
@@ -7388,7 +7388,7 @@
         <p:spPr>
           <a:xfrm>
             <a:off x="7010248" y="3218688"/>
-            <a:ext cx="4248760" cy="585216"/>
+            <a:ext cx="4267048" cy="585216"/>
           </a:xfrm>
           <a:prstGeom prst="rect">
             <a:avLst/>
@@ -7516,7 +7516,7 @@
         <p:spPr>
           <a:xfrm>
             <a:off x="7010248" y="3950208"/>
-            <a:ext cx="4248760" cy="585216"/>
+            <a:ext cx="4267048" cy="585216"/>
           </a:xfrm>
           <a:prstGeom prst="rect">
             <a:avLst/>
@@ -7554,7 +7554,7 @@
         </p:nvSpPr>
         <p:spPr>
           <a:xfrm>
-            <a:off x="640080" y="5468112"/>
+            <a:off x="640080" y="4736592"/>
             <a:ext cx="10911535" cy="7315"/>
           </a:xfrm>
           <a:prstGeom prst="rect">
@@ -7579,7 +7579,7 @@
         </p:nvSpPr>
         <p:spPr>
           <a:xfrm>
-            <a:off x="640080" y="5577840"/>
+            <a:off x="640080" y="4846320"/>
             <a:ext cx="10911535" cy="402336"/>
           </a:xfrm>
           <a:prstGeom prst="rect">

--- a/dist/weeks-포트폴리오제작/포트폴리오제작_03주차_벤치마킹.pptx
+++ b/dist/weeks-포트폴리오제작/포트폴리오제작_03주차_벤치마킹.pptx
@@ -2689,7 +2689,7 @@
                 <a:ea typeface="Pretendard" pitchFamily="34" charset="-122"/>
                 <a:cs typeface="Pretendard" pitchFamily="34" charset="-120"/>
               </a:rPr>
-              <a:t>90분 — 사전 과제 리뷰 15분 · 그룹 분석 50분 · 정리 25분</a:t>
+              <a:t>120분 — 사전 과제 리뷰 15분 · 그룹 분석 50분 · 정리 30분 · 공유 15분</a:t>
             </a:r>
             <a:endParaRPr lang="en-US" sz="1200" dirty="0"/>
           </a:p>
@@ -5542,7 +5542,7 @@
                 <a:ea typeface="Pretendard" pitchFamily="34" charset="-122"/>
                 <a:cs typeface="Pretendard" pitchFamily="34" charset="-120"/>
               </a:rPr>
-              <a:t>25분 · 개인 — 조별 분석을 내 것으로 옮깁니다.</a:t>
+              <a:t>30분 · 개인 — 조별 분석을 내 것으로 옮깁니다.</a:t>
             </a:r>
             <a:endParaRPr lang="en-US" sz="1150" dirty="0"/>
           </a:p>
@@ -5606,7 +5606,7 @@
                 <a:ea typeface="Pretendard Light" pitchFamily="34" charset="-122"/>
                 <a:cs typeface="Pretendard Light" pitchFamily="34" charset="-120"/>
               </a:rPr>
-              <a:t>8분</a:t>
+              <a:t>9분</a:t>
             </a:r>
             <a:endParaRPr lang="en-US" sz="2200" dirty="0"/>
           </a:p>
@@ -5751,7 +5751,7 @@
                 <a:ea typeface="Pretendard Light" pitchFamily="34" charset="-122"/>
                 <a:cs typeface="Pretendard Light" pitchFamily="34" charset="-120"/>
               </a:rPr>
-              <a:t>7분</a:t>
+              <a:t>8분</a:t>
             </a:r>
             <a:endParaRPr lang="en-US" sz="2200" dirty="0"/>
           </a:p>
@@ -5896,7 +5896,7 @@
                 <a:ea typeface="Pretendard Light" pitchFamily="34" charset="-122"/>
                 <a:cs typeface="Pretendard Light" pitchFamily="34" charset="-120"/>
               </a:rPr>
-              <a:t>6분</a:t>
+              <a:t>8분</a:t>
             </a:r>
             <a:endParaRPr lang="en-US" sz="2200" dirty="0"/>
           </a:p>
@@ -6041,7 +6041,7 @@
                 <a:ea typeface="Pretendard Light" pitchFamily="34" charset="-122"/>
                 <a:cs typeface="Pretendard Light" pitchFamily="34" charset="-120"/>
               </a:rPr>
-              <a:t>4분</a:t>
+              <a:t>5분</a:t>
             </a:r>
             <a:endParaRPr lang="en-US" sz="2200" dirty="0"/>
           </a:p>
@@ -9151,7 +9151,7 @@
                 <a:ea typeface="Pretendard Black" pitchFamily="34" charset="-122"/>
                 <a:cs typeface="Pretendard Black" pitchFamily="34" charset="-120"/>
               </a:rPr>
-              <a:t>오늘의 90분</a:t>
+              <a:t>오늘의 120분</a:t>
             </a:r>
             <a:endParaRPr lang="en-US" sz="3000" dirty="0"/>
           </a:p>
@@ -9190,7 +9190,7 @@
                 <a:ea typeface="Pretendard" pitchFamily="34" charset="-122"/>
                 <a:cs typeface="Pretendard" pitchFamily="34" charset="-120"/>
               </a:rPr>
-              <a:t>사전 과제 리뷰 15분 · 그룹 분석 50분 · 정리 25분</a:t>
+              <a:t>사전 과제 리뷰 15분 · 그룹 분석 50분 · 정리 30분 · 공유 15분</a:t>
             </a:r>
             <a:endParaRPr lang="en-US" sz="1150" dirty="0"/>
           </a:p>
@@ -9230,7 +9230,7 @@
         <p:spPr>
           <a:xfrm>
             <a:off x="640080" y="1719072"/>
-            <a:ext cx="1600200" cy="932688"/>
+            <a:ext cx="1600200" cy="830275"/>
           </a:xfrm>
           <a:prstGeom prst="rect">
             <a:avLst/>
@@ -9269,7 +9269,7 @@
         <p:spPr>
           <a:xfrm>
             <a:off x="2377440" y="1719072"/>
-            <a:ext cx="6888175" cy="932688"/>
+            <a:ext cx="6888175" cy="830275"/>
           </a:xfrm>
           <a:prstGeom prst="rect">
             <a:avLst/>
@@ -9308,7 +9308,7 @@
         <p:spPr>
           <a:xfrm>
             <a:off x="9265615" y="1719072"/>
-            <a:ext cx="2286000" cy="932688"/>
+            <a:ext cx="2286000" cy="830275"/>
           </a:xfrm>
           <a:prstGeom prst="rect">
             <a:avLst/>
@@ -9346,7 +9346,7 @@
         </p:nvSpPr>
         <p:spPr>
           <a:xfrm>
-            <a:off x="640080" y="2633472"/>
+            <a:off x="640080" y="2531059"/>
             <a:ext cx="10911535" cy="7315"/>
           </a:xfrm>
           <a:prstGeom prst="rect">
@@ -9371,8 +9371,8 @@
         </p:nvSpPr>
         <p:spPr>
           <a:xfrm>
-            <a:off x="640080" y="2651760"/>
-            <a:ext cx="1600200" cy="932688"/>
+            <a:off x="640080" y="2549347"/>
+            <a:ext cx="1600200" cy="830275"/>
           </a:xfrm>
           <a:prstGeom prst="rect">
             <a:avLst/>
@@ -9410,8 +9410,8 @@
         </p:nvSpPr>
         <p:spPr>
           <a:xfrm>
-            <a:off x="2377440" y="2651760"/>
-            <a:ext cx="6888175" cy="932688"/>
+            <a:off x="2377440" y="2549347"/>
+            <a:ext cx="6888175" cy="830275"/>
           </a:xfrm>
           <a:prstGeom prst="rect">
             <a:avLst/>
@@ -9435,7 +9435,7 @@
                 <a:ea typeface="Pretendard" pitchFamily="34" charset="-122"/>
                 <a:cs typeface="Pretendard" pitchFamily="34" charset="-120"/>
               </a:rPr>
-              <a:t>사례 그룹 분석 및 토론</a:t>
+              <a:t>실습 1 — 사례 그룹 분석</a:t>
             </a:r>
             <a:endParaRPr lang="en-US" sz="1300" dirty="0"/>
           </a:p>
@@ -9449,8 +9449,8 @@
         </p:nvSpPr>
         <p:spPr>
           <a:xfrm>
-            <a:off x="9265615" y="2651760"/>
-            <a:ext cx="2286000" cy="932688"/>
+            <a:off x="9265615" y="2549347"/>
+            <a:ext cx="2286000" cy="830275"/>
           </a:xfrm>
           <a:prstGeom prst="rect">
             <a:avLst/>
@@ -9488,7 +9488,7 @@
         </p:nvSpPr>
         <p:spPr>
           <a:xfrm>
-            <a:off x="640080" y="3566160"/>
+            <a:off x="640080" y="3361334"/>
             <a:ext cx="10911535" cy="7315"/>
           </a:xfrm>
           <a:prstGeom prst="rect">
@@ -9513,8 +9513,111 @@
         </p:nvSpPr>
         <p:spPr>
           <a:xfrm>
-            <a:off x="640080" y="3584448"/>
-            <a:ext cx="1600200" cy="932688"/>
+            <a:off x="640080" y="3379622"/>
+            <a:ext cx="1600200" cy="830275"/>
+          </a:xfrm>
+          <a:prstGeom prst="rect">
+            <a:avLst/>
+          </a:prstGeom>
+          <a:noFill/>
+          <a:ln/>
+        </p:spPr>
+        <p:txBody>
+          <a:bodyPr wrap="square" lIns="0" tIns="0" rIns="0" bIns="0" rtlCol="0" anchor="ctr"/>
+          <a:lstStyle/>
+          <a:p>
+            <a:pPr indent="0" marL="0">
+              <a:buNone/>
+            </a:pPr>
+            <a:r>
+              <a:rPr lang="en-US" sz="1050" spc="60" kern="0" dirty="0">
+                <a:solidFill>
+                  <a:srgbClr val="9B9B9B"/>
+                </a:solidFill>
+                <a:latin typeface="Pretendard" pitchFamily="34" charset="0"/>
+                <a:ea typeface="Pretendard" pitchFamily="34" charset="-122"/>
+                <a:cs typeface="Pretendard" pitchFamily="34" charset="-120"/>
+              </a:rPr>
+              <a:t>01:05–01:15</a:t>
+            </a:r>
+            <a:endParaRPr lang="en-US" sz="1050" dirty="0"/>
+          </a:p>
+        </p:txBody>
+      </p:sp>
+      <p:sp>
+        <p:nvSpPr>
+          <p:cNvPr id="19" name="Text 17"/>
+          <p:cNvSpPr/>
+          <p:nvPr/>
+        </p:nvSpPr>
+        <p:spPr>
+          <a:xfrm>
+            <a:off x="2377440" y="3379622"/>
+            <a:ext cx="6888175" cy="830275"/>
+          </a:xfrm>
+          <a:prstGeom prst="rect">
+            <a:avLst/>
+          </a:prstGeom>
+          <a:noFill/>
+          <a:ln/>
+        </p:spPr>
+        <p:txBody>
+          <a:bodyPr wrap="square" lIns="0" tIns="0" rIns="0" bIns="0" rtlCol="0" anchor="ctr"/>
+          <a:lstStyle/>
+          <a:p>
+            <a:pPr indent="0" marL="0">
+              <a:buNone/>
+            </a:pPr>
+            <a:r>
+              <a:rPr lang="en-US" sz="1100" dirty="0">
+                <a:solidFill>
+                  <a:srgbClr val="9B9B9B"/>
+                </a:solidFill>
+                <a:latin typeface="Pretendard" pitchFamily="34" charset="0"/>
+                <a:ea typeface="Pretendard" pitchFamily="34" charset="-122"/>
+                <a:cs typeface="Pretendard" pitchFamily="34" charset="-120"/>
+              </a:rPr>
+              <a:t>휴식</a:t>
+            </a:r>
+            <a:endParaRPr lang="en-US" sz="1100" dirty="0"/>
+          </a:p>
+        </p:txBody>
+      </p:sp>
+      <p:sp>
+        <p:nvSpPr>
+          <p:cNvPr id="20" name="Shape 18"/>
+          <p:cNvSpPr/>
+          <p:nvPr/>
+        </p:nvSpPr>
+        <p:spPr>
+          <a:xfrm>
+            <a:off x="640080" y="4191610"/>
+            <a:ext cx="10911535" cy="7315"/>
+          </a:xfrm>
+          <a:prstGeom prst="rect">
+            <a:avLst/>
+          </a:prstGeom>
+          <a:solidFill>
+            <a:srgbClr val="EFEFEF"/>
+          </a:solidFill>
+          <a:ln w="12700">
+            <a:solidFill>
+              <a:srgbClr val="EFEFEF"/>
+            </a:solidFill>
+            <a:prstDash val="solid"/>
+          </a:ln>
+        </p:spPr>
+      </p:sp>
+      <p:sp>
+        <p:nvSpPr>
+          <p:cNvPr id="21" name="Text 19"/>
+          <p:cNvSpPr/>
+          <p:nvPr/>
+        </p:nvSpPr>
+        <p:spPr>
+          <a:xfrm>
+            <a:off x="640080" y="4209898"/>
+            <a:ext cx="1600200" cy="830275"/>
           </a:xfrm>
           <a:prstGeom prst="rect">
             <a:avLst/>
@@ -9538,7 +9641,7 @@
                 <a:ea typeface="Pretendard" pitchFamily="34" charset="-122"/>
                 <a:cs typeface="Pretendard" pitchFamily="34" charset="-120"/>
               </a:rPr>
-              <a:t>01:05–01:30</a:t>
+              <a:t>01:15–01:45</a:t>
             </a:r>
             <a:endParaRPr lang="en-US" sz="1050" dirty="0"/>
           </a:p>
@@ -9546,14 +9649,14 @@
       </p:sp>
       <p:sp>
         <p:nvSpPr>
-          <p:cNvPr id="19" name="Text 17"/>
-          <p:cNvSpPr/>
-          <p:nvPr/>
-        </p:nvSpPr>
-        <p:spPr>
-          <a:xfrm>
-            <a:off x="2377440" y="3584448"/>
-            <a:ext cx="6888175" cy="932688"/>
+          <p:cNvPr id="22" name="Text 20"/>
+          <p:cNvSpPr/>
+          <p:nvPr/>
+        </p:nvSpPr>
+        <p:spPr>
+          <a:xfrm>
+            <a:off x="2377440" y="4209898"/>
+            <a:ext cx="6888175" cy="830275"/>
           </a:xfrm>
           <a:prstGeom prst="rect">
             <a:avLst/>
@@ -9577,7 +9680,7 @@
                 <a:ea typeface="Pretendard" pitchFamily="34" charset="-122"/>
                 <a:cs typeface="Pretendard" pitchFamily="34" charset="-120"/>
               </a:rPr>
-              <a:t>벤치마킹 인사이트 정리</a:t>
+              <a:t>실습 2 — 벤치마킹 인사이트 정리</a:t>
             </a:r>
             <a:endParaRPr lang="en-US" sz="1300" dirty="0"/>
           </a:p>
@@ -9585,14 +9688,14 @@
       </p:sp>
       <p:sp>
         <p:nvSpPr>
-          <p:cNvPr id="20" name="Text 18"/>
-          <p:cNvSpPr/>
-          <p:nvPr/>
-        </p:nvSpPr>
-        <p:spPr>
-          <a:xfrm>
-            <a:off x="9265615" y="3584448"/>
-            <a:ext cx="2286000" cy="932688"/>
+          <p:cNvPr id="23" name="Text 21"/>
+          <p:cNvSpPr/>
+          <p:nvPr/>
+        </p:nvSpPr>
+        <p:spPr>
+          <a:xfrm>
+            <a:off x="9265615" y="4209898"/>
+            <a:ext cx="2286000" cy="830275"/>
           </a:xfrm>
           <a:prstGeom prst="rect">
             <a:avLst/>
@@ -9624,14 +9727,156 @@
       </p:sp>
       <p:sp>
         <p:nvSpPr>
-          <p:cNvPr id="21" name="Shape 19"/>
-          <p:cNvSpPr/>
-          <p:nvPr/>
-        </p:nvSpPr>
-        <p:spPr>
-          <a:xfrm>
-            <a:off x="640080" y="4828032"/>
-            <a:ext cx="10911535" cy="969264"/>
+          <p:cNvPr id="24" name="Shape 22"/>
+          <p:cNvSpPr/>
+          <p:nvPr/>
+        </p:nvSpPr>
+        <p:spPr>
+          <a:xfrm>
+            <a:off x="640080" y="5021885"/>
+            <a:ext cx="10911535" cy="7315"/>
+          </a:xfrm>
+          <a:prstGeom prst="rect">
+            <a:avLst/>
+          </a:prstGeom>
+          <a:solidFill>
+            <a:srgbClr val="DCDCDC"/>
+          </a:solidFill>
+          <a:ln w="12700">
+            <a:solidFill>
+              <a:srgbClr val="DCDCDC"/>
+            </a:solidFill>
+            <a:prstDash val="solid"/>
+          </a:ln>
+        </p:spPr>
+      </p:sp>
+      <p:sp>
+        <p:nvSpPr>
+          <p:cNvPr id="25" name="Text 23"/>
+          <p:cNvSpPr/>
+          <p:nvPr/>
+        </p:nvSpPr>
+        <p:spPr>
+          <a:xfrm>
+            <a:off x="640080" y="5040173"/>
+            <a:ext cx="1600200" cy="830275"/>
+          </a:xfrm>
+          <a:prstGeom prst="rect">
+            <a:avLst/>
+          </a:prstGeom>
+          <a:noFill/>
+          <a:ln/>
+        </p:spPr>
+        <p:txBody>
+          <a:bodyPr wrap="square" lIns="0" tIns="0" rIns="0" bIns="0" rtlCol="0" anchor="ctr"/>
+          <a:lstStyle/>
+          <a:p>
+            <a:pPr indent="0" marL="0">
+              <a:buNone/>
+            </a:pPr>
+            <a:r>
+              <a:rPr lang="en-US" sz="1050" b="1" spc="60" kern="0" dirty="0">
+                <a:solidFill>
+                  <a:srgbClr val="111111"/>
+                </a:solidFill>
+                <a:latin typeface="Pretendard" pitchFamily="34" charset="0"/>
+                <a:ea typeface="Pretendard" pitchFamily="34" charset="-122"/>
+                <a:cs typeface="Pretendard" pitchFamily="34" charset="-120"/>
+              </a:rPr>
+              <a:t>01:45–02:00</a:t>
+            </a:r>
+            <a:endParaRPr lang="en-US" sz="1050" dirty="0"/>
+          </a:p>
+        </p:txBody>
+      </p:sp>
+      <p:sp>
+        <p:nvSpPr>
+          <p:cNvPr id="26" name="Text 24"/>
+          <p:cNvSpPr/>
+          <p:nvPr/>
+        </p:nvSpPr>
+        <p:spPr>
+          <a:xfrm>
+            <a:off x="2377440" y="5040173"/>
+            <a:ext cx="6888175" cy="830275"/>
+          </a:xfrm>
+          <a:prstGeom prst="rect">
+            <a:avLst/>
+          </a:prstGeom>
+          <a:noFill/>
+          <a:ln/>
+        </p:spPr>
+        <p:txBody>
+          <a:bodyPr wrap="square" lIns="0" tIns="0" rIns="0" bIns="0" rtlCol="0" anchor="ctr"/>
+          <a:lstStyle/>
+          <a:p>
+            <a:pPr indent="0" marL="0">
+              <a:buNone/>
+            </a:pPr>
+            <a:r>
+              <a:rPr lang="en-US" sz="1300" b="1" dirty="0">
+                <a:solidFill>
+                  <a:srgbClr val="111111"/>
+                </a:solidFill>
+                <a:latin typeface="Pretendard" pitchFamily="34" charset="0"/>
+                <a:ea typeface="Pretendard" pitchFamily="34" charset="-122"/>
+                <a:cs typeface="Pretendard" pitchFamily="34" charset="-120"/>
+              </a:rPr>
+              <a:t>조별 공유 · 과제 안내</a:t>
+            </a:r>
+            <a:endParaRPr lang="en-US" sz="1300" dirty="0"/>
+          </a:p>
+        </p:txBody>
+      </p:sp>
+      <p:sp>
+        <p:nvSpPr>
+          <p:cNvPr id="27" name="Text 25"/>
+          <p:cNvSpPr/>
+          <p:nvPr/>
+        </p:nvSpPr>
+        <p:spPr>
+          <a:xfrm>
+            <a:off x="9265615" y="5040173"/>
+            <a:ext cx="2286000" cy="830275"/>
+          </a:xfrm>
+          <a:prstGeom prst="rect">
+            <a:avLst/>
+          </a:prstGeom>
+          <a:noFill/>
+          <a:ln/>
+        </p:spPr>
+        <p:txBody>
+          <a:bodyPr wrap="square" lIns="0" tIns="0" rIns="0" bIns="0" rtlCol="0" anchor="ctr"/>
+          <a:lstStyle/>
+          <a:p>
+            <a:pPr algn="r" indent="0" marL="0">
+              <a:buNone/>
+            </a:pPr>
+            <a:r>
+              <a:rPr lang="en-US" sz="1050" dirty="0">
+                <a:solidFill>
+                  <a:srgbClr val="6E6E6E"/>
+                </a:solidFill>
+                <a:latin typeface="Pretendard" pitchFamily="34" charset="0"/>
+                <a:ea typeface="Pretendard" pitchFamily="34" charset="-122"/>
+                <a:cs typeface="Pretendard" pitchFamily="34" charset="-120"/>
+              </a:rPr>
+              <a:t>조별 + 안내</a:t>
+            </a:r>
+            <a:endParaRPr lang="en-US" sz="1050" dirty="0"/>
+          </a:p>
+        </p:txBody>
+      </p:sp>
+      <p:sp>
+        <p:nvSpPr>
+          <p:cNvPr id="28" name="Shape 26"/>
+          <p:cNvSpPr/>
+          <p:nvPr/>
+        </p:nvSpPr>
+        <p:spPr>
+          <a:xfrm>
+            <a:off x="640080" y="5852160"/>
+            <a:ext cx="10911535" cy="7315"/>
           </a:xfrm>
           <a:prstGeom prst="rect">
             <a:avLst/>
@@ -9649,88 +9894,7 @@
       </p:sp>
       <p:sp>
         <p:nvSpPr>
-          <p:cNvPr id="22" name="Text 20"/>
-          <p:cNvSpPr/>
-          <p:nvPr/>
-        </p:nvSpPr>
-        <p:spPr>
-          <a:xfrm>
-            <a:off x="1097280" y="5010912"/>
-            <a:ext cx="2743200" cy="256032"/>
-          </a:xfrm>
-          <a:prstGeom prst="rect">
-            <a:avLst/>
-          </a:prstGeom>
-          <a:noFill/>
-          <a:ln/>
-        </p:spPr>
-        <p:txBody>
-          <a:bodyPr wrap="square" lIns="0" tIns="0" rIns="0" bIns="0" rtlCol="0" anchor="ctr"/>
-          <a:lstStyle/>
-          <a:p>
-            <a:pPr indent="0" marL="0">
-              <a:buNone/>
-            </a:pPr>
-            <a:r>
-              <a:rPr lang="en-US" sz="950" spc="240" kern="0" dirty="0">
-                <a:solidFill>
-                  <a:srgbClr val="9A9A9A"/>
-                </a:solidFill>
-                <a:latin typeface="Pretendard" pitchFamily="34" charset="0"/>
-                <a:ea typeface="Pretendard" pitchFamily="34" charset="-122"/>
-                <a:cs typeface="Pretendard" pitchFamily="34" charset="-120"/>
-              </a:rPr>
-              <a:t>오늘 끝나면</a:t>
-            </a:r>
-            <a:endParaRPr lang="en-US" sz="950" dirty="0"/>
-          </a:p>
-        </p:txBody>
-      </p:sp>
-      <p:sp>
-        <p:nvSpPr>
-          <p:cNvPr id="23" name="Text 21"/>
-          <p:cNvSpPr/>
-          <p:nvPr/>
-        </p:nvSpPr>
-        <p:spPr>
-          <a:xfrm>
-            <a:off x="1097280" y="5285232"/>
-            <a:ext cx="9997135" cy="365760"/>
-          </a:xfrm>
-          <a:prstGeom prst="rect">
-            <a:avLst/>
-          </a:prstGeom>
-          <a:noFill/>
-          <a:ln/>
-        </p:spPr>
-        <p:txBody>
-          <a:bodyPr wrap="square" lIns="0" tIns="0" rIns="0" bIns="0" rtlCol="0" anchor="ctr"/>
-          <a:lstStyle/>
-          <a:p>
-            <a:pPr indent="0" marL="0">
-              <a:lnSpc>
-                <a:spcPct val="126000"/>
-              </a:lnSpc>
-              <a:buNone/>
-            </a:pPr>
-            <a:r>
-              <a:rPr lang="en-US" sz="1600" dirty="0">
-                <a:solidFill>
-                  <a:srgbClr val="FFFFFF"/>
-                </a:solidFill>
-                <a:latin typeface="Pretendard Black" pitchFamily="34" charset="0"/>
-                <a:ea typeface="Pretendard Black" pitchFamily="34" charset="-122"/>
-                <a:cs typeface="Pretendard Black" pitchFamily="34" charset="-120"/>
-              </a:rPr>
-              <a:t>사례에서 가져올 것 3가지와 가져오지 않을 것 1가지를 근거와 함께 갖게 됩니다.</a:t>
-            </a:r>
-            <a:endParaRPr lang="en-US" sz="1600" dirty="0"/>
-          </a:p>
-        </p:txBody>
-      </p:sp>
-      <p:sp>
-        <p:nvSpPr>
-          <p:cNvPr id="24" name="Shape 22"/>
+          <p:cNvPr id="29" name="Shape 27"/>
           <p:cNvSpPr/>
           <p:nvPr/>
         </p:nvSpPr>
@@ -9755,7 +9919,7 @@
       </p:sp>
       <p:sp>
         <p:nvSpPr>
-          <p:cNvPr id="25" name="Text 23"/>
+          <p:cNvPr id="30" name="Text 28"/>
           <p:cNvSpPr/>
           <p:nvPr/>
         </p:nvSpPr>
@@ -9794,7 +9958,7 @@
       </p:sp>
       <p:sp>
         <p:nvSpPr>
-          <p:cNvPr id="26" name="Text 24"/>
+          <p:cNvPr id="31" name="Text 29"/>
           <p:cNvSpPr/>
           <p:nvPr/>
         </p:nvSpPr>

--- a/dist/weeks-포트폴리오제작/포트폴리오제작_03주차_벤치마킹.pptx
+++ b/dist/weeks-포트폴리오제작/포트폴리오제작_03주차_벤치마킹.pptx
@@ -516,7 +516,8 @@
           <a:p>
             <a:r>
               <a:rPr lang="en-US" dirty="0"/>
-              <a:t>플립러닝 구조다. 1주차 스크랩 과제를 안 해온 학생은 오늘 조별 분석에 참여할 재료가 없다. 시작 전에 확인하고, 없으면 조원 자료를 함께 보게 배치할 것.</a:t>
+              <a:t>[운영 메모]
+플립러닝 구조다. 1주차 스크랩 과제를 안 해온 학생은 오늘 조별 분석에 참여할 재료가 없다. 시작 전에 확인하고, 없으면 조원 자료를 함께 보게 배치할 것.</a:t>
             </a:r>
             <a:endParaRPr lang="en-US" dirty="0"/>
           </a:p>
@@ -604,7 +605,8 @@
           <a:p>
             <a:r>
               <a:rPr lang="en-US" dirty="0"/>
-              <a:t>02에서 학생들이 무리한 아이디어를 내는 경우가 많다. 03의 대조 단계를 반드시 거치게 할 것.</a:t>
+              <a:t>[운영 메모]
+02에서 학생들이 무리한 아이디어를 내는 경우가 많다. 03의 대조 단계를 반드시 거치게 할 것.</a:t>
             </a:r>
             <a:endParaRPr lang="en-US" dirty="0"/>
           </a:p>
@@ -692,7 +694,8 @@
           <a:p>
             <a:r>
               <a:rPr lang="en-US" dirty="0"/>
-              <a:t>50분 + 25분. 조는 목표 직무가 비슷한 사람끼리.</a:t>
+              <a:t>[운영 메모]
+50분 + 25분. 조는 목표 직무가 비슷한 사람끼리.</a:t>
             </a:r>
             <a:endParaRPr lang="en-US" dirty="0"/>
           </a:p>
@@ -780,7 +783,8 @@
           <a:p>
             <a:r>
               <a:rPr lang="en-US" dirty="0"/>
-              <a:t>유형 판정에서 의견이 갈릴 때가 가장 좋은 순간이다. 서둘러 정답을 주지 말고 근거를 말하게 할 것.</a:t>
+              <a:t>[운영 메모]
+유형 판정에서 의견이 갈릴 때가 가장 좋은 순간이다. 서둘러 정답을 주지 말고 근거를 말하게 할 것.</a:t>
             </a:r>
             <a:endParaRPr lang="en-US" dirty="0"/>
           </a:p>
@@ -868,7 +872,8 @@
           <a:p>
             <a:r>
               <a:rPr lang="en-US" dirty="0"/>
-              <a:t>마지막 4분이 이 실습의 핵심이다. 시간이 없어도 이 단계는 반드시 시킬 것.</a:t>
+              <a:t>[운영 메모]
+마지막 4분이 이 실습의 핵심이다. 시간이 없어도 이 단계는 반드시 시킬 것.</a:t>
             </a:r>
             <a:endParaRPr lang="en-US" dirty="0"/>
           </a:p>
@@ -956,7 +961,8 @@
           <a:p>
             <a:r>
               <a:rPr lang="en-US" dirty="0"/>
-              <a:t>리포트 양식을 클래스룸에 올려둘 것. 표로 만들어두면 학생들이 훨씬 구체적으로 쓴다.</a:t>
+              <a:t>[운영 메모]
+리포트 양식을 클래스룸에 올려둘 것. 표로 만들어두면 학생들이 훨씬 구체적으로 쓴다.</a:t>
             </a:r>
             <a:endParaRPr lang="en-US" dirty="0"/>
           </a:p>
@@ -1044,7 +1050,8 @@
           <a:p>
             <a:r>
               <a:rPr lang="en-US" dirty="0"/>
-              <a:t>'안 가져올 것'을 요구하는 것이 핵심이다. 벤치마킹이 모방으로 흐르는 것을 막는 장치이므로 반드시 채워 오게 할 것.</a:t>
+              <a:t>[운영 메모]
+'안 가져올 것'을 요구하는 것이 핵심이다. 벤치마킹이 모방으로 흐르는 것을 막는 장치이므로 반드시 채워 오게 할 것.</a:t>
             </a:r>
             <a:endParaRPr lang="en-US" dirty="0"/>
           </a:p>
@@ -1132,7 +1139,8 @@
           <a:p>
             <a:r>
               <a:rPr lang="en-US" dirty="0"/>
-              <a:t>조는 목표 직무가 비슷한 사람끼리 묶는 것이 좋다. 2주차에 확정한 직무를 기준으로 미리 조를 짜 두면 토론이 훨씬 잘 굴러간다.</a:t>
+              <a:t>[운영 메모]
+조는 목표 직무가 비슷한 사람끼리 묶는 것이 좋다. 2주차에 확정한 직무를 기준으로 미리 조를 짜 두면 토론이 훨씬 잘 굴러간다.</a:t>
             </a:r>
             <a:endParaRPr lang="en-US" dirty="0"/>
           </a:p>
@@ -1220,7 +1228,8 @@
           <a:p>
             <a:r>
               <a:rPr lang="en-US" dirty="0"/>
-              <a:t>3번이 오늘의 실질적 목표. 학생들은 좋아 보이는 것을 그대로 따라 하려 한다.</a:t>
+              <a:t>[운영 메모]
+3번이 오늘의 실질적 목표. 학생들은 좋아 보이는 것을 그대로 따라 하려 한다.</a:t>
             </a:r>
             <a:endParaRPr lang="en-US" dirty="0"/>
           </a:p>
@@ -1308,7 +1317,8 @@
           <a:p>
             <a:r>
               <a:rPr lang="en-US" dirty="0"/>
-              <a:t>15분 구간. 강사가 사례 하나를 화면에 띄우고 직접 분해해 보이는 것이 가장 빠르다.</a:t>
+              <a:t>[운영 메모]
+15분 구간. 강사가 사례 하나를 화면에 띄우고 직접 분해해 보이는 것이 가장 빠르다.</a:t>
             </a:r>
             <a:endParaRPr lang="en-US" dirty="0"/>
           </a:p>
@@ -1396,7 +1406,8 @@
           <a:p>
             <a:r>
               <a:rPr lang="en-US" dirty="0"/>
-              <a:t>학생들이 스크린샷만 모아오는 것을 막는 슬라이드. 질문 두 개를 판서해두고 조별 토론 내내 남겨둘 것.</a:t>
+              <a:t>[운영 메모]
+학생들이 스크린샷만 모아오는 것을 막는 슬라이드. 질문 두 개를 판서해두고 조별 토론 내내 남겨둘 것.</a:t>
             </a:r>
             <a:endParaRPr lang="en-US" dirty="0"/>
           </a:p>
@@ -1484,7 +1495,8 @@
           <a:p>
             <a:r>
               <a:rPr lang="en-US" dirty="0"/>
-              <a:t>학생들이 1·2번에 과도하게 공을 들이다 정작 프로젝트가 부실해지는 경우가 많다.</a:t>
+              <a:t>[운영 메모]
+학생들이 1·2번에 과도하게 공을 들이다 정작 프로젝트가 부실해지는 경우가 많다.</a:t>
             </a:r>
             <a:endParaRPr lang="en-US" dirty="0"/>
           </a:p>
@@ -1572,7 +1584,8 @@
           <a:p>
             <a:r>
               <a:rPr lang="en-US" dirty="0"/>
-              <a:t>15분 구간.</a:t>
+              <a:t>[운영 메모]
+15분 구간.</a:t>
             </a:r>
             <a:endParaRPr lang="en-US" dirty="0"/>
           </a:p>
@@ -1660,7 +1673,8 @@
           <a:p>
             <a:r>
               <a:rPr lang="en-US" dirty="0"/>
-              <a:t>실내·산업디자인 전공생 대부분이 프로세스형으로 간다. 다만 UX로 지원할 학생은 문제 해결형으로 다시 써야 한다는 점을 짚을 것.</a:t>
+              <a:t>[운영 메모]
+실내·산업디자인 전공생 대부분이 프로세스형으로 간다. 다만 UX로 지원할 학생은 문제 해결형으로 다시 써야 한다는 점을 짚을 것.</a:t>
             </a:r>
             <a:endParaRPr lang="en-US" dirty="0"/>
           </a:p>
@@ -1748,7 +1762,8 @@
           <a:p>
             <a:r>
               <a:rPr lang="en-US" dirty="0"/>
-              <a:t>장수가 적은 쪽이 더 잘 읽힌다는 점이 학생들에게는 반직관적이다. 실제 사례로 보여줄 것.</a:t>
+              <a:t>[운영 메모]
+장수가 적은 쪽이 더 잘 읽힌다는 점이 학생들에게는 반직관적이다. 실제 사례로 보여줄 것.</a:t>
             </a:r>
             <a:endParaRPr lang="en-US" dirty="0"/>
           </a:p>
